--- a/data/sites/sales/Sales Playbooks/enterprise-revenue-execution-playbook-deck (edited copy).pptx
+++ b/data/sites/sales/Sales Playbooks/enterprise-revenue-execution-playbook-deck (edited copy).pptx
@@ -15,8 +15,6 @@
     <p:sldId id="263" r:id="rId14"/>
     <p:sldId id="264" r:id="rId15"/>
     <p:sldId id="265" r:id="rId16"/>
-    <p:sldId id="266" r:id="rId17"/>
-    <p:sldId id="267" r:id="rId18"/>
   </p:sldIdLst>
   <p:sldSz cx="12191695" cy="6858000" type="screen4x3"/>
   <p:notesSz cx="6858000" cy="9144000"/>
@@ -3493,7 +3491,7 @@
           <a:lstStyle/>
           <a:p>
             <a:r>
-              <a:t>10. Cross-Functional Dependencies - Enterprise Revenue Execution Playboo</a:t>
+              <a:t>10. Appendix, Lineage &amp; Sign-off - Enterprise Revenue Execution Playboo</a:t>
             </a:r>
           </a:p>
         </p:txBody>
@@ -3514,7 +3512,7 @@
           <a:lstStyle/>
           <a:p>
             <a:r>
-              <a:t>Multi-slide enablement deck covering enterprise discovery, MEDDPICC qualification, competitive positioning against Northstar, and deal desk guardrails. Reviewed for current governance cycle. Section 10 (Cross-Functional Dependencies) applies to Sales Playbooks within Sales &amp; Marketing Knowledge Hub and is maintained by Rachel Kim. Documents upstream and downstream team dependencies and service-level commitments.</a:t>
+              <a:t>Multi-slide enablement deck covering enterprise discovery, MEDDPICC qualification, competitive positioning against Northstar, and deal desk guardrails. Reviewed for current governance cycle. Section 10 (Appendix, Lineage &amp; Sign-off) applies to Sales Playbooks within Sales &amp; Marketing Knowledge Hub and is maintained by Rachel Kim. Records document lineage, governance metadata, version history, and owner sign-off.</a:t>
             </a:r>
           </a:p>
           <a:p>
@@ -3865,886 +3863,6 @@
                       </a:pPr>
                       <a:r>
                         <a:t>Stage 10 Verified</a:t>
-                      </a:r>
-                    </a:p>
-                  </a:txBody>
-                  <a:tcPr/>
-                </a:tc>
-              </a:tr>
-            </a:tbl>
-          </a:graphicData>
-        </a:graphic>
-      </p:graphicFrame>
-      <p:pic>
-        <p:nvPicPr>
-          <p:cNvPr id="5" name="Picture 4" descr="image.png"/>
-          <p:cNvPicPr>
-            <a:picLocks noChangeAspect="1"/>
-          </p:cNvPicPr>
-          <p:nvPr/>
-        </p:nvPicPr>
-        <p:blipFill>
-          <a:blip r:embed="rId2"/>
-          <a:stretch>
-            <a:fillRect/>
-          </a:stretch>
-        </p:blipFill>
-        <p:spPr>
-          <a:xfrm>
-            <a:off x="6492240" y="3703320"/>
-            <a:ext cx="5120640" cy="1828800"/>
-          </a:xfrm>
-          <a:prstGeom prst="rect">
-            <a:avLst/>
-          </a:prstGeom>
-        </p:spPr>
-      </p:pic>
-    </p:spTree>
-  </p:cSld>
-  <p:clrMapOvr>
-    <a:masterClrMapping/>
-  </p:clrMapOvr>
-</p:sld>
-</file>
-
-<file path=ppt/slides/slide11.xml><?xml version="1.0" encoding="utf-8"?>
-<p:sld xmlns:a="http://schemas.openxmlformats.org/drawingml/2006/main" xmlns:p="http://schemas.openxmlformats.org/presentationml/2006/main" xmlns:r="http://schemas.openxmlformats.org/officeDocument/2006/relationships">
-  <p:cSld>
-    <p:spTree>
-      <p:nvGrpSpPr>
-        <p:cNvPr id="1" name=""/>
-        <p:cNvGrpSpPr/>
-        <p:nvPr/>
-      </p:nvGrpSpPr>
-      <p:grpSpPr/>
-      <p:sp>
-        <p:nvSpPr>
-          <p:cNvPr id="2" name="Title 1"/>
-          <p:cNvSpPr>
-            <a:spLocks noGrp="1"/>
-          </p:cNvSpPr>
-          <p:nvPr>
-            <p:ph type="title"/>
-          </p:nvPr>
-        </p:nvSpPr>
-        <p:spPr/>
-        <p:txBody>
-          <a:bodyPr/>
-          <a:lstStyle/>
-          <a:p>
-            <a:r>
-              <a:t>11. Continuous Improvement Roadmap - Enterprise Revenue Execution Playboo</a:t>
-            </a:r>
-          </a:p>
-        </p:txBody>
-      </p:sp>
-      <p:sp>
-        <p:nvSpPr>
-          <p:cNvPr id="3" name="Content Placeholder 2"/>
-          <p:cNvSpPr>
-            <a:spLocks noGrp="1"/>
-          </p:cNvSpPr>
-          <p:nvPr>
-            <p:ph idx="1"/>
-          </p:nvPr>
-        </p:nvSpPr>
-        <p:spPr/>
-        <p:txBody>
-          <a:bodyPr/>
-          <a:lstStyle/>
-          <a:p>
-            <a:r>
-              <a:t>Multi-slide enablement deck covering enterprise discovery, MEDDPICC qualification, competitive positioning against Northstar, and deal desk guardrails. Reviewed for current governance cycle. Section 11 (Continuous Improvement Roadmap) applies to Sales Playbooks within Sales &amp; Marketing Knowledge Hub and is maintained by Rachel Kim. Schedules quarterly optimization milestones, automation targets, and capability reviews.</a:t>
-            </a:r>
-          </a:p>
-          <a:p>
-            <a:pPr lvl="1"/>
-            <a:r>
-              <a:t>Details discount approval tiers, multi-year ramp structures, and legal SLA paths.</a:t>
-            </a:r>
-          </a:p>
-          <a:p>
-            <a:pPr lvl="1"/>
-            <a:r>
-              <a:t>Provides stage-by-stage exit criteria from Discovery through Closed-Won.</a:t>
-            </a:r>
-          </a:p>
-          <a:p>
-            <a:pPr lvl="1"/>
-            <a:r>
-              <a:t>Section 11 review cadence is tracked by Rachel Kim under Sales Playbooks governance.</a:t>
-            </a:r>
-          </a:p>
-        </p:txBody>
-      </p:sp>
-      <p:graphicFrame>
-        <p:nvGraphicFramePr>
-          <p:cNvPr id="4" name="Table 3"/>
-          <p:cNvGraphicFramePr>
-            <a:graphicFrameLocks noGrp="1"/>
-          </p:cNvGraphicFramePr>
-          <p:nvPr/>
-        </p:nvGraphicFramePr>
-        <p:xfrm>
-          <a:off x="548640" y="3749039"/>
-          <a:ext cx="5669280" cy="1737360"/>
-        </p:xfrm>
-        <a:graphic>
-          <a:graphicData uri="http://schemas.openxmlformats.org/drawingml/2006/table">
-            <a:tbl>
-              <a:tblPr firstRow="1" bandRow="1">
-                <a:tableStyleId>{5C22544A-7EE6-4342-B048-85BDC9FD1C3A}</a:tableStyleId>
-              </a:tblPr>
-              <a:tblGrid>
-                <a:gridCol w="1417320"/>
-                <a:gridCol w="1417320"/>
-                <a:gridCol w="1417320"/>
-                <a:gridCol w="1417320"/>
-              </a:tblGrid>
-              <a:tr h="347472">
-                <a:tc>
-                  <a:txBody>
-                    <a:bodyPr/>
-                    <a:lstStyle/>
-                    <a:p>
-                      <a:pPr>
-                        <a:defRPr b="1" sz="1100"/>
-                      </a:pPr>
-                      <a:r>
-                        <a:t>Deal Stage</a:t>
-                      </a:r>
-                    </a:p>
-                  </a:txBody>
-                  <a:tcPr/>
-                </a:tc>
-                <a:tc>
-                  <a:txBody>
-                    <a:bodyPr/>
-                    <a:lstStyle/>
-                    <a:p>
-                      <a:pPr>
-                        <a:defRPr b="1" sz="1100"/>
-                      </a:pPr>
-                      <a:r>
-                        <a:t>Exit Criteria</a:t>
-                      </a:r>
-                    </a:p>
-                  </a:txBody>
-                  <a:tcPr/>
-                </a:tc>
-                <a:tc>
-                  <a:txBody>
-                    <a:bodyPr/>
-                    <a:lstStyle/>
-                    <a:p>
-                      <a:pPr>
-                        <a:defRPr b="1" sz="1100"/>
-                      </a:pPr>
-                      <a:r>
-                        <a:t>Target Duration</a:t>
-                      </a:r>
-                    </a:p>
-                  </a:txBody>
-                  <a:tcPr/>
-                </a:tc>
-                <a:tc>
-                  <a:txBody>
-                    <a:bodyPr/>
-                    <a:lstStyle/>
-                    <a:p>
-                      <a:pPr>
-                        <a:defRPr b="1" sz="1100"/>
-                      </a:pPr>
-                      <a:r>
-                        <a:t>Win Conversion</a:t>
-                      </a:r>
-                    </a:p>
-                  </a:txBody>
-                  <a:tcPr/>
-                </a:tc>
-              </a:tr>
-              <a:tr h="347472">
-                <a:tc>
-                  <a:txBody>
-                    <a:bodyPr/>
-                    <a:lstStyle/>
-                    <a:p>
-                      <a:pPr>
-                        <a:defRPr sz="1000"/>
-                      </a:pPr>
-                      <a:r>
-                        <a:t>1. Discovery</a:t>
-                      </a:r>
-                    </a:p>
-                  </a:txBody>
-                  <a:tcPr/>
-                </a:tc>
-                <a:tc>
-                  <a:txBody>
-                    <a:bodyPr/>
-                    <a:lstStyle/>
-                    <a:p>
-                      <a:pPr>
-                        <a:defRPr sz="1000"/>
-                      </a:pPr>
-                      <a:r>
-                        <a:t>Pain + Champion Identified</a:t>
-                      </a:r>
-                    </a:p>
-                  </a:txBody>
-                  <a:tcPr/>
-                </a:tc>
-                <a:tc>
-                  <a:txBody>
-                    <a:bodyPr/>
-                    <a:lstStyle/>
-                    <a:p>
-                      <a:pPr>
-                        <a:defRPr sz="1000"/>
-                      </a:pPr>
-                      <a:r>
-                        <a:t>14 days</a:t>
-                      </a:r>
-                    </a:p>
-                  </a:txBody>
-                  <a:tcPr/>
-                </a:tc>
-                <a:tc>
-                  <a:txBody>
-                    <a:bodyPr/>
-                    <a:lstStyle/>
-                    <a:p>
-                      <a:pPr>
-                        <a:defRPr sz="1000"/>
-                      </a:pPr>
-                      <a:r>
-                        <a:t>42%</a:t>
-                      </a:r>
-                    </a:p>
-                  </a:txBody>
-                  <a:tcPr/>
-                </a:tc>
-              </a:tr>
-              <a:tr h="347472">
-                <a:tc>
-                  <a:txBody>
-                    <a:bodyPr/>
-                    <a:lstStyle/>
-                    <a:p>
-                      <a:pPr>
-                        <a:defRPr sz="1000"/>
-                      </a:pPr>
-                      <a:r>
-                        <a:t>2. Technical Validation</a:t>
-                      </a:r>
-                    </a:p>
-                  </a:txBody>
-                  <a:tcPr/>
-                </a:tc>
-                <a:tc>
-                  <a:txBody>
-                    <a:bodyPr/>
-                    <a:lstStyle/>
-                    <a:p>
-                      <a:pPr>
-                        <a:defRPr sz="1000"/>
-                      </a:pPr>
-                      <a:r>
-                        <a:t>POC Success Criteria Met</a:t>
-                      </a:r>
-                    </a:p>
-                  </a:txBody>
-                  <a:tcPr/>
-                </a:tc>
-                <a:tc>
-                  <a:txBody>
-                    <a:bodyPr/>
-                    <a:lstStyle/>
-                    <a:p>
-                      <a:pPr>
-                        <a:defRPr sz="1000"/>
-                      </a:pPr>
-                      <a:r>
-                        <a:t>21 days</a:t>
-                      </a:r>
-                    </a:p>
-                  </a:txBody>
-                  <a:tcPr/>
-                </a:tc>
-                <a:tc>
-                  <a:txBody>
-                    <a:bodyPr/>
-                    <a:lstStyle/>
-                    <a:p>
-                      <a:pPr>
-                        <a:defRPr sz="1000"/>
-                      </a:pPr>
-                      <a:r>
-                        <a:t>68%</a:t>
-                      </a:r>
-                    </a:p>
-                  </a:txBody>
-                  <a:tcPr/>
-                </a:tc>
-              </a:tr>
-              <a:tr h="347472">
-                <a:tc>
-                  <a:txBody>
-                    <a:bodyPr/>
-                    <a:lstStyle/>
-                    <a:p>
-                      <a:pPr>
-                        <a:defRPr sz="1000"/>
-                      </a:pPr>
-                      <a:r>
-                        <a:t>3. Commercial Review</a:t>
-                      </a:r>
-                    </a:p>
-                  </a:txBody>
-                  <a:tcPr/>
-                </a:tc>
-                <a:tc>
-                  <a:txBody>
-                    <a:bodyPr/>
-                    <a:lstStyle/>
-                    <a:p>
-                      <a:pPr>
-                        <a:defRPr sz="1000"/>
-                      </a:pPr>
-                      <a:r>
-                        <a:t>Economic Buyer + Deal Desk Sign-off</a:t>
-                      </a:r>
-                    </a:p>
-                  </a:txBody>
-                  <a:tcPr/>
-                </a:tc>
-                <a:tc>
-                  <a:txBody>
-                    <a:bodyPr/>
-                    <a:lstStyle/>
-                    <a:p>
-                      <a:pPr>
-                        <a:defRPr sz="1000"/>
-                      </a:pPr>
-                      <a:r>
-                        <a:t>10 days</a:t>
-                      </a:r>
-                    </a:p>
-                  </a:txBody>
-                  <a:tcPr/>
-                </a:tc>
-                <a:tc>
-                  <a:txBody>
-                    <a:bodyPr/>
-                    <a:lstStyle/>
-                    <a:p>
-                      <a:pPr>
-                        <a:defRPr sz="1000"/>
-                      </a:pPr>
-                      <a:r>
-                        <a:t>84%</a:t>
-                      </a:r>
-                    </a:p>
-                  </a:txBody>
-                  <a:tcPr/>
-                </a:tc>
-              </a:tr>
-              <a:tr h="347472">
-                <a:tc>
-                  <a:txBody>
-                    <a:bodyPr/>
-                    <a:lstStyle/>
-                    <a:p>
-                      <a:pPr>
-                        <a:defRPr sz="1000"/>
-                      </a:pPr>
-                      <a:r>
-                        <a:t>Sec-11</a:t>
-                      </a:r>
-                    </a:p>
-                  </a:txBody>
-                  <a:tcPr/>
-                </a:tc>
-                <a:tc>
-                  <a:txBody>
-                    <a:bodyPr/>
-                    <a:lstStyle/>
-                    <a:p>
-                      <a:pPr>
-                        <a:defRPr sz="1000"/>
-                      </a:pPr>
-                      <a:r>
-                        <a:t>POC Success Criteria Met</a:t>
-                      </a:r>
-                    </a:p>
-                  </a:txBody>
-                  <a:tcPr/>
-                </a:tc>
-                <a:tc>
-                  <a:txBody>
-                    <a:bodyPr/>
-                    <a:lstStyle/>
-                    <a:p>
-                      <a:pPr>
-                        <a:defRPr sz="1000"/>
-                      </a:pPr>
-                      <a:r>
-                        <a:t>21 days</a:t>
-                      </a:r>
-                    </a:p>
-                  </a:txBody>
-                  <a:tcPr/>
-                </a:tc>
-                <a:tc>
-                  <a:txBody>
-                    <a:bodyPr/>
-                    <a:lstStyle/>
-                    <a:p>
-                      <a:pPr>
-                        <a:defRPr sz="1000"/>
-                      </a:pPr>
-                      <a:r>
-                        <a:t>Stage 11 Verified</a:t>
-                      </a:r>
-                    </a:p>
-                  </a:txBody>
-                  <a:tcPr/>
-                </a:tc>
-              </a:tr>
-            </a:tbl>
-          </a:graphicData>
-        </a:graphic>
-      </p:graphicFrame>
-      <p:pic>
-        <p:nvPicPr>
-          <p:cNvPr id="5" name="Picture 4" descr="image.png"/>
-          <p:cNvPicPr>
-            <a:picLocks noChangeAspect="1"/>
-          </p:cNvPicPr>
-          <p:nvPr/>
-        </p:nvPicPr>
-        <p:blipFill>
-          <a:blip r:embed="rId2"/>
-          <a:stretch>
-            <a:fillRect/>
-          </a:stretch>
-        </p:blipFill>
-        <p:spPr>
-          <a:xfrm>
-            <a:off x="6492240" y="3703320"/>
-            <a:ext cx="5120640" cy="1828800"/>
-          </a:xfrm>
-          <a:prstGeom prst="rect">
-            <a:avLst/>
-          </a:prstGeom>
-        </p:spPr>
-      </p:pic>
-    </p:spTree>
-  </p:cSld>
-  <p:clrMapOvr>
-    <a:masterClrMapping/>
-  </p:clrMapOvr>
-</p:sld>
-</file>
-
-<file path=ppt/slides/slide12.xml><?xml version="1.0" encoding="utf-8"?>
-<p:sld xmlns:a="http://schemas.openxmlformats.org/drawingml/2006/main" xmlns:p="http://schemas.openxmlformats.org/presentationml/2006/main" xmlns:r="http://schemas.openxmlformats.org/officeDocument/2006/relationships">
-  <p:cSld>
-    <p:spTree>
-      <p:nvGrpSpPr>
-        <p:cNvPr id="1" name=""/>
-        <p:cNvGrpSpPr/>
-        <p:nvPr/>
-      </p:nvGrpSpPr>
-      <p:grpSpPr/>
-      <p:sp>
-        <p:nvSpPr>
-          <p:cNvPr id="2" name="Title 1"/>
-          <p:cNvSpPr>
-            <a:spLocks noGrp="1"/>
-          </p:cNvSpPr>
-          <p:nvPr>
-            <p:ph type="title"/>
-          </p:nvPr>
-        </p:nvSpPr>
-        <p:spPr/>
-        <p:txBody>
-          <a:bodyPr/>
-          <a:lstStyle/>
-          <a:p>
-            <a:r>
-              <a:t>12. Appendix, Lineage &amp; Sign-off - Enterprise Revenue Execution Playboo</a:t>
-            </a:r>
-          </a:p>
-        </p:txBody>
-      </p:sp>
-      <p:sp>
-        <p:nvSpPr>
-          <p:cNvPr id="3" name="Content Placeholder 2"/>
-          <p:cNvSpPr>
-            <a:spLocks noGrp="1"/>
-          </p:cNvSpPr>
-          <p:nvPr>
-            <p:ph idx="1"/>
-          </p:nvPr>
-        </p:nvSpPr>
-        <p:spPr/>
-        <p:txBody>
-          <a:bodyPr/>
-          <a:lstStyle/>
-          <a:p>
-            <a:r>
-              <a:t>Multi-slide enablement deck covering enterprise discovery, MEDDPICC qualification, competitive positioning against Northstar, and deal desk guardrails. Reviewed for current governance cycle. Section 12 (Appendix, Lineage &amp; Sign-off) applies to Sales Playbooks within Sales &amp; Marketing Knowledge Hub and is maintained by Rachel Kim. Records document lineage, governance metadata, version history, and owner sign-off.</a:t>
-            </a:r>
-          </a:p>
-          <a:p>
-            <a:pPr lvl="1"/>
-            <a:r>
-              <a:t>Provides stage-by-stage exit criteria from Discovery through Closed-Won.</a:t>
-            </a:r>
-          </a:p>
-          <a:p>
-            <a:pPr lvl="1"/>
-            <a:r>
-              <a:t>Walks reps through executive value hypothesis and technical evaluation milestones.</a:t>
-            </a:r>
-          </a:p>
-          <a:p>
-            <a:pPr lvl="1"/>
-            <a:r>
-              <a:t>Section 12 review cadence is tracked by Rachel Kim under Sales Playbooks governance.</a:t>
-            </a:r>
-          </a:p>
-        </p:txBody>
-      </p:sp>
-      <p:graphicFrame>
-        <p:nvGraphicFramePr>
-          <p:cNvPr id="4" name="Table 3"/>
-          <p:cNvGraphicFramePr>
-            <a:graphicFrameLocks noGrp="1"/>
-          </p:cNvGraphicFramePr>
-          <p:nvPr/>
-        </p:nvGraphicFramePr>
-        <p:xfrm>
-          <a:off x="548640" y="3749039"/>
-          <a:ext cx="5669280" cy="1737360"/>
-        </p:xfrm>
-        <a:graphic>
-          <a:graphicData uri="http://schemas.openxmlformats.org/drawingml/2006/table">
-            <a:tbl>
-              <a:tblPr firstRow="1" bandRow="1">
-                <a:tableStyleId>{5C22544A-7EE6-4342-B048-85BDC9FD1C3A}</a:tableStyleId>
-              </a:tblPr>
-              <a:tblGrid>
-                <a:gridCol w="1417320"/>
-                <a:gridCol w="1417320"/>
-                <a:gridCol w="1417320"/>
-                <a:gridCol w="1417320"/>
-              </a:tblGrid>
-              <a:tr h="347472">
-                <a:tc>
-                  <a:txBody>
-                    <a:bodyPr/>
-                    <a:lstStyle/>
-                    <a:p>
-                      <a:pPr>
-                        <a:defRPr b="1" sz="1100"/>
-                      </a:pPr>
-                      <a:r>
-                        <a:t>Deal Stage</a:t>
-                      </a:r>
-                    </a:p>
-                  </a:txBody>
-                  <a:tcPr/>
-                </a:tc>
-                <a:tc>
-                  <a:txBody>
-                    <a:bodyPr/>
-                    <a:lstStyle/>
-                    <a:p>
-                      <a:pPr>
-                        <a:defRPr b="1" sz="1100"/>
-                      </a:pPr>
-                      <a:r>
-                        <a:t>Exit Criteria</a:t>
-                      </a:r>
-                    </a:p>
-                  </a:txBody>
-                  <a:tcPr/>
-                </a:tc>
-                <a:tc>
-                  <a:txBody>
-                    <a:bodyPr/>
-                    <a:lstStyle/>
-                    <a:p>
-                      <a:pPr>
-                        <a:defRPr b="1" sz="1100"/>
-                      </a:pPr>
-                      <a:r>
-                        <a:t>Target Duration</a:t>
-                      </a:r>
-                    </a:p>
-                  </a:txBody>
-                  <a:tcPr/>
-                </a:tc>
-                <a:tc>
-                  <a:txBody>
-                    <a:bodyPr/>
-                    <a:lstStyle/>
-                    <a:p>
-                      <a:pPr>
-                        <a:defRPr b="1" sz="1100"/>
-                      </a:pPr>
-                      <a:r>
-                        <a:t>Win Conversion</a:t>
-                      </a:r>
-                    </a:p>
-                  </a:txBody>
-                  <a:tcPr/>
-                </a:tc>
-              </a:tr>
-              <a:tr h="347472">
-                <a:tc>
-                  <a:txBody>
-                    <a:bodyPr/>
-                    <a:lstStyle/>
-                    <a:p>
-                      <a:pPr>
-                        <a:defRPr sz="1000"/>
-                      </a:pPr>
-                      <a:r>
-                        <a:t>1. Discovery</a:t>
-                      </a:r>
-                    </a:p>
-                  </a:txBody>
-                  <a:tcPr/>
-                </a:tc>
-                <a:tc>
-                  <a:txBody>
-                    <a:bodyPr/>
-                    <a:lstStyle/>
-                    <a:p>
-                      <a:pPr>
-                        <a:defRPr sz="1000"/>
-                      </a:pPr>
-                      <a:r>
-                        <a:t>Pain + Champion Identified</a:t>
-                      </a:r>
-                    </a:p>
-                  </a:txBody>
-                  <a:tcPr/>
-                </a:tc>
-                <a:tc>
-                  <a:txBody>
-                    <a:bodyPr/>
-                    <a:lstStyle/>
-                    <a:p>
-                      <a:pPr>
-                        <a:defRPr sz="1000"/>
-                      </a:pPr>
-                      <a:r>
-                        <a:t>14 days</a:t>
-                      </a:r>
-                    </a:p>
-                  </a:txBody>
-                  <a:tcPr/>
-                </a:tc>
-                <a:tc>
-                  <a:txBody>
-                    <a:bodyPr/>
-                    <a:lstStyle/>
-                    <a:p>
-                      <a:pPr>
-                        <a:defRPr sz="1000"/>
-                      </a:pPr>
-                      <a:r>
-                        <a:t>42%</a:t>
-                      </a:r>
-                    </a:p>
-                  </a:txBody>
-                  <a:tcPr/>
-                </a:tc>
-              </a:tr>
-              <a:tr h="347472">
-                <a:tc>
-                  <a:txBody>
-                    <a:bodyPr/>
-                    <a:lstStyle/>
-                    <a:p>
-                      <a:pPr>
-                        <a:defRPr sz="1000"/>
-                      </a:pPr>
-                      <a:r>
-                        <a:t>2. Technical Validation</a:t>
-                      </a:r>
-                    </a:p>
-                  </a:txBody>
-                  <a:tcPr/>
-                </a:tc>
-                <a:tc>
-                  <a:txBody>
-                    <a:bodyPr/>
-                    <a:lstStyle/>
-                    <a:p>
-                      <a:pPr>
-                        <a:defRPr sz="1000"/>
-                      </a:pPr>
-                      <a:r>
-                        <a:t>POC Success Criteria Met</a:t>
-                      </a:r>
-                    </a:p>
-                  </a:txBody>
-                  <a:tcPr/>
-                </a:tc>
-                <a:tc>
-                  <a:txBody>
-                    <a:bodyPr/>
-                    <a:lstStyle/>
-                    <a:p>
-                      <a:pPr>
-                        <a:defRPr sz="1000"/>
-                      </a:pPr>
-                      <a:r>
-                        <a:t>21 days</a:t>
-                      </a:r>
-                    </a:p>
-                  </a:txBody>
-                  <a:tcPr/>
-                </a:tc>
-                <a:tc>
-                  <a:txBody>
-                    <a:bodyPr/>
-                    <a:lstStyle/>
-                    <a:p>
-                      <a:pPr>
-                        <a:defRPr sz="1000"/>
-                      </a:pPr>
-                      <a:r>
-                        <a:t>68%</a:t>
-                      </a:r>
-                    </a:p>
-                  </a:txBody>
-                  <a:tcPr/>
-                </a:tc>
-              </a:tr>
-              <a:tr h="347472">
-                <a:tc>
-                  <a:txBody>
-                    <a:bodyPr/>
-                    <a:lstStyle/>
-                    <a:p>
-                      <a:pPr>
-                        <a:defRPr sz="1000"/>
-                      </a:pPr>
-                      <a:r>
-                        <a:t>3. Commercial Review</a:t>
-                      </a:r>
-                    </a:p>
-                  </a:txBody>
-                  <a:tcPr/>
-                </a:tc>
-                <a:tc>
-                  <a:txBody>
-                    <a:bodyPr/>
-                    <a:lstStyle/>
-                    <a:p>
-                      <a:pPr>
-                        <a:defRPr sz="1000"/>
-                      </a:pPr>
-                      <a:r>
-                        <a:t>Economic Buyer + Deal Desk Sign-off</a:t>
-                      </a:r>
-                    </a:p>
-                  </a:txBody>
-                  <a:tcPr/>
-                </a:tc>
-                <a:tc>
-                  <a:txBody>
-                    <a:bodyPr/>
-                    <a:lstStyle/>
-                    <a:p>
-                      <a:pPr>
-                        <a:defRPr sz="1000"/>
-                      </a:pPr>
-                      <a:r>
-                        <a:t>10 days</a:t>
-                      </a:r>
-                    </a:p>
-                  </a:txBody>
-                  <a:tcPr/>
-                </a:tc>
-                <a:tc>
-                  <a:txBody>
-                    <a:bodyPr/>
-                    <a:lstStyle/>
-                    <a:p>
-                      <a:pPr>
-                        <a:defRPr sz="1000"/>
-                      </a:pPr>
-                      <a:r>
-                        <a:t>84%</a:t>
-                      </a:r>
-                    </a:p>
-                  </a:txBody>
-                  <a:tcPr/>
-                </a:tc>
-              </a:tr>
-              <a:tr h="347472">
-                <a:tc>
-                  <a:txBody>
-                    <a:bodyPr/>
-                    <a:lstStyle/>
-                    <a:p>
-                      <a:pPr>
-                        <a:defRPr sz="1000"/>
-                      </a:pPr>
-                      <a:r>
-                        <a:t>Sec-12</a:t>
-                      </a:r>
-                    </a:p>
-                  </a:txBody>
-                  <a:tcPr/>
-                </a:tc>
-                <a:tc>
-                  <a:txBody>
-                    <a:bodyPr/>
-                    <a:lstStyle/>
-                    <a:p>
-                      <a:pPr>
-                        <a:defRPr sz="1000"/>
-                      </a:pPr>
-                      <a:r>
-                        <a:t>Economic Buyer + Deal Desk Sign-off</a:t>
-                      </a:r>
-                    </a:p>
-                  </a:txBody>
-                  <a:tcPr/>
-                </a:tc>
-                <a:tc>
-                  <a:txBody>
-                    <a:bodyPr/>
-                    <a:lstStyle/>
-                    <a:p>
-                      <a:pPr>
-                        <a:defRPr sz="1000"/>
-                      </a:pPr>
-                      <a:r>
-                        <a:t>10 days</a:t>
-                      </a:r>
-                    </a:p>
-                  </a:txBody>
-                  <a:tcPr/>
-                </a:tc>
-                <a:tc>
-                  <a:txBody>
-                    <a:bodyPr/>
-                    <a:lstStyle/>
-                    <a:p>
-                      <a:pPr>
-                        <a:defRPr sz="1000"/>
-                      </a:pPr>
-                      <a:r>
-                        <a:t>Stage 12 Verified</a:t>
                       </a:r>
                     </a:p>
                   </a:txBody>
